--- a/PPT/Review-3.pptx
+++ b/PPT/Review-3.pptx
@@ -212,7 +212,7 @@
 <file path=ppt/revisionInfo.xml><?xml version="1.0" encoding="utf-8"?>
 <p1510:revInfo xmlns:a="http://schemas.openxmlformats.org/drawingml/2006/main" xmlns:r="http://schemas.openxmlformats.org/officeDocument/2006/relationships" xmlns:p1510="http://schemas.microsoft.com/office/powerpoint/2015/10/main">
   <p1510:revLst>
-    <p1510:client id="{FAC0FE7F-90E4-4EAA-A70E-61303D3C9F0F}" v="2" dt="2025-12-22T14:52:50.361"/>
+    <p1510:client id="{8192475B-F1E0-4AED-A3A8-CA7C01DC8D5D}" v="3" dt="2026-01-19T07:08:18.904"/>
   </p1510:revLst>
 </p1510:revInfo>
 </file>
@@ -226,35 +226,12 @@
       <pc:docMkLst>
         <pc:docMk/>
       </pc:docMkLst>
-      <pc:sldChg chg="del">
-        <pc:chgData name="SANDEEP KUMAR REDDY TAVVA" userId="10a689a2c5b210cf" providerId="LiveId" clId="{F7CA484F-DC9C-467D-A897-77F417B2FB0F}" dt="2025-12-22T14:52:53.100" v="11" actId="47"/>
-        <pc:sldMkLst>
-          <pc:docMk/>
-          <pc:sldMk cId="3853256293" sldId="491"/>
-        </pc:sldMkLst>
-      </pc:sldChg>
       <pc:sldChg chg="addSp delSp modSp mod">
         <pc:chgData name="SANDEEP KUMAR REDDY TAVVA" userId="10a689a2c5b210cf" providerId="LiveId" clId="{F7CA484F-DC9C-467D-A897-77F417B2FB0F}" dt="2025-12-22T13:21:31.497" v="9" actId="14100"/>
         <pc:sldMkLst>
           <pc:docMk/>
           <pc:sldMk cId="1765490695" sldId="546"/>
         </pc:sldMkLst>
-        <pc:picChg chg="add mod">
-          <ac:chgData name="SANDEEP KUMAR REDDY TAVVA" userId="10a689a2c5b210cf" providerId="LiveId" clId="{F7CA484F-DC9C-467D-A897-77F417B2FB0F}" dt="2025-12-22T13:21:31.497" v="9" actId="14100"/>
-          <ac:picMkLst>
-            <pc:docMk/>
-            <pc:sldMk cId="1765490695" sldId="546"/>
-            <ac:picMk id="5" creationId="{25831EC7-041F-B0EA-6281-BCD6EB1E16B1}"/>
-          </ac:picMkLst>
-        </pc:picChg>
-        <pc:picChg chg="del">
-          <ac:chgData name="SANDEEP KUMAR REDDY TAVVA" userId="10a689a2c5b210cf" providerId="LiveId" clId="{F7CA484F-DC9C-467D-A897-77F417B2FB0F}" dt="2025-12-22T13:21:09.998" v="0" actId="478"/>
-          <ac:picMkLst>
-            <pc:docMk/>
-            <pc:sldMk cId="1765490695" sldId="546"/>
-            <ac:picMk id="8" creationId="{BF5355E9-AFEB-1110-BB5F-C64D1EBA21A8}"/>
-          </ac:picMkLst>
-        </pc:picChg>
       </pc:sldChg>
       <pc:sldChg chg="modSp add mod">
         <pc:chgData name="SANDEEP KUMAR REDDY TAVVA" userId="10a689a2c5b210cf" providerId="LiveId" clId="{F7CA484F-DC9C-467D-A897-77F417B2FB0F}" dt="2025-12-22T14:52:58.761" v="14" actId="20577"/>
@@ -268,6 +245,83 @@
             <pc:docMk/>
             <pc:sldMk cId="4190622535" sldId="573"/>
             <ac:spMk id="12" creationId="{8C1951C4-93AE-4DB7-B5EA-49D22832BBB9}"/>
+          </ac:spMkLst>
+        </pc:spChg>
+      </pc:sldChg>
+    </pc:docChg>
+  </pc:docChgLst>
+  <pc:docChgLst>
+    <pc:chgData name="SANDEEP KUMAR REDDY TAVVA" userId="10a689a2c5b210cf" providerId="LiveId" clId="{BA029B44-F033-462E-91A3-7CABCAE711FD}"/>
+    <pc:docChg chg="custSel modSld">
+      <pc:chgData name="SANDEEP KUMAR REDDY TAVVA" userId="10a689a2c5b210cf" providerId="LiveId" clId="{BA029B44-F033-462E-91A3-7CABCAE711FD}" dt="2026-01-19T07:08:21.807" v="17" actId="1076"/>
+      <pc:docMkLst>
+        <pc:docMk/>
+      </pc:docMkLst>
+      <pc:sldChg chg="modSp mod">
+        <pc:chgData name="SANDEEP KUMAR REDDY TAVVA" userId="10a689a2c5b210cf" providerId="LiveId" clId="{BA029B44-F033-462E-91A3-7CABCAE711FD}" dt="2026-01-18T12:02:08.208" v="2"/>
+        <pc:sldMkLst>
+          <pc:docMk/>
+          <pc:sldMk cId="2215252507" sldId="504"/>
+        </pc:sldMkLst>
+        <pc:spChg chg="mod">
+          <ac:chgData name="SANDEEP KUMAR REDDY TAVVA" userId="10a689a2c5b210cf" providerId="LiveId" clId="{BA029B44-F033-462E-91A3-7CABCAE711FD}" dt="2026-01-18T12:02:08.208" v="2"/>
+          <ac:spMkLst>
+            <pc:docMk/>
+            <pc:sldMk cId="2215252507" sldId="504"/>
+            <ac:spMk id="4" creationId="{C701CA59-BAE9-4C29-B48F-96586977FC02}"/>
+          </ac:spMkLst>
+        </pc:spChg>
+      </pc:sldChg>
+      <pc:sldChg chg="addSp delSp modSp mod">
+        <pc:chgData name="SANDEEP KUMAR REDDY TAVVA" userId="10a689a2c5b210cf" providerId="LiveId" clId="{BA029B44-F033-462E-91A3-7CABCAE711FD}" dt="2026-01-19T07:08:21.807" v="17" actId="1076"/>
+        <pc:sldMkLst>
+          <pc:docMk/>
+          <pc:sldMk cId="1765490695" sldId="546"/>
+        </pc:sldMkLst>
+        <pc:picChg chg="add mod">
+          <ac:chgData name="SANDEEP KUMAR REDDY TAVVA" userId="10a689a2c5b210cf" providerId="LiveId" clId="{BA029B44-F033-462E-91A3-7CABCAE711FD}" dt="2026-01-19T07:08:21.807" v="17" actId="1076"/>
+          <ac:picMkLst>
+            <pc:docMk/>
+            <pc:sldMk cId="1765490695" sldId="546"/>
+            <ac:picMk id="4" creationId="{DC95EA71-1B02-54E2-9A65-0ED34D7DABF7}"/>
+          </ac:picMkLst>
+        </pc:picChg>
+        <pc:picChg chg="del">
+          <ac:chgData name="SANDEEP KUMAR REDDY TAVVA" userId="10a689a2c5b210cf" providerId="LiveId" clId="{BA029B44-F033-462E-91A3-7CABCAE711FD}" dt="2026-01-19T07:08:08.136" v="15" actId="478"/>
+          <ac:picMkLst>
+            <pc:docMk/>
+            <pc:sldMk cId="1765490695" sldId="546"/>
+            <ac:picMk id="5" creationId="{25831EC7-041F-B0EA-6281-BCD6EB1E16B1}"/>
+          </ac:picMkLst>
+        </pc:picChg>
+      </pc:sldChg>
+      <pc:sldChg chg="modSp mod">
+        <pc:chgData name="SANDEEP KUMAR REDDY TAVVA" userId="10a689a2c5b210cf" providerId="LiveId" clId="{BA029B44-F033-462E-91A3-7CABCAE711FD}" dt="2026-01-18T12:04:07.324" v="12" actId="12"/>
+        <pc:sldMkLst>
+          <pc:docMk/>
+          <pc:sldMk cId="1810486344" sldId="570"/>
+        </pc:sldMkLst>
+        <pc:spChg chg="mod">
+          <ac:chgData name="SANDEEP KUMAR REDDY TAVVA" userId="10a689a2c5b210cf" providerId="LiveId" clId="{BA029B44-F033-462E-91A3-7CABCAE711FD}" dt="2026-01-18T12:04:07.324" v="12" actId="12"/>
+          <ac:spMkLst>
+            <pc:docMk/>
+            <pc:sldMk cId="1810486344" sldId="570"/>
+            <ac:spMk id="4" creationId="{07078092-A859-0247-97B7-A32033B0EC36}"/>
+          </ac:spMkLst>
+        </pc:spChg>
+      </pc:sldChg>
+      <pc:sldChg chg="modSp mod">
+        <pc:chgData name="SANDEEP KUMAR REDDY TAVVA" userId="10a689a2c5b210cf" providerId="LiveId" clId="{BA029B44-F033-462E-91A3-7CABCAE711FD}" dt="2026-01-18T12:06:25.997" v="14" actId="20577"/>
+        <pc:sldMkLst>
+          <pc:docMk/>
+          <pc:sldMk cId="2653941675" sldId="572"/>
+        </pc:sldMkLst>
+        <pc:spChg chg="mod">
+          <ac:chgData name="SANDEEP KUMAR REDDY TAVVA" userId="10a689a2c5b210cf" providerId="LiveId" clId="{BA029B44-F033-462E-91A3-7CABCAE711FD}" dt="2026-01-18T12:06:25.997" v="14" actId="20577"/>
+          <ac:spMkLst>
+            <pc:docMk/>
+            <pc:sldMk cId="2653941675" sldId="572"/>
+            <ac:spMk id="4" creationId="{12F0E47B-359C-BFC0-468B-C84CA213D790}"/>
           </ac:spMkLst>
         </pc:spChg>
       </pc:sldChg>
@@ -2411,7 +2465,7 @@
           <a:p>
             <a:fld id="{1D8BD707-D9CF-40AE-B4C6-C98DA3205C09}" type="datetimeFigureOut">
               <a:rPr lang="en-US"/>
-              <a:t>12/22/2025</a:t>
+              <a:t>1/19/2026</a:t>
             </a:fld>
             <a:endParaRPr lang="en-US"/>
           </a:p>
@@ -6877,20 +6931,24 @@
                 <a:latin typeface="Times New Roman" panose="02020603050405020304" pitchFamily="18" charset="0"/>
                 <a:cs typeface="Times New Roman" panose="02020603050405020304" pitchFamily="18" charset="0"/>
               </a:rPr>
-              <a:t> Real-time QR scans from student mobile profiles and text-based NLP commands from faculty.</a:t>
-            </a:r>
-          </a:p>
-          <a:p>
-            <a:pPr marL="628650" lvl="1" indent="-171450" eaLnBrk="0" fontAlgn="base" hangingPunct="0">
-              <a:spcBef>
-                <a:spcPct val="0"/>
-              </a:spcBef>
-              <a:spcAft>
-                <a:spcPct val="0"/>
-              </a:spcAft>
-              <a:buFont typeface="Courier New" panose="02070309020205020404" pitchFamily="49" charset="0"/>
-              <a:buChar char="o"/>
-            </a:pPr>
+              <a:t> Real-time QR scans from student mobile profiles </a:t>
+            </a:r>
+            <a:r>
+              <a:rPr kumimoji="0" lang="en-GB" altLang="en-US" sz="1200" b="0" i="0" u="none" strike="noStrike" cap="none" normalizeH="0" baseline="0" dirty="0">
+                <a:ln>
+                  <a:noFill/>
+                </a:ln>
+                <a:solidFill>
+                  <a:schemeClr val="accent2">
+                    <a:lumMod val="50000"/>
+                  </a:schemeClr>
+                </a:solidFill>
+                <a:effectLst/>
+                <a:latin typeface="Times New Roman" panose="02020603050405020304" pitchFamily="18" charset="0"/>
+                <a:cs typeface="Times New Roman" panose="02020603050405020304" pitchFamily="18" charset="0"/>
+              </a:rPr>
+              <a:t>real-time Manual Override logs from the Faculty dashboard for exception handling.</a:t>
+            </a:r>
             <a:endParaRPr kumimoji="0" lang="en-US" altLang="en-US" sz="1200" b="0" i="0" u="none" strike="noStrike" cap="none" normalizeH="0" baseline="0" dirty="0">
               <a:ln>
                 <a:noFill/>
@@ -7581,8 +7639,8 @@
         </p:nvSpPr>
         <p:spPr bwMode="auto">
           <a:xfrm rot="10800000" flipV="1">
-            <a:off x="91440" y="1113312"/>
-            <a:ext cx="9052560" cy="3539430"/>
+            <a:off x="91440" y="1221034"/>
+            <a:ext cx="9052560" cy="3323987"/>
           </a:xfrm>
           <a:prstGeom prst="rect">
             <a:avLst/>
@@ -7799,7 +7857,7 @@
                 <a:latin typeface="Times New Roman" panose="02020603050405020304" pitchFamily="18" charset="0"/>
                 <a:cs typeface="Times New Roman" panose="02020603050405020304" pitchFamily="18" charset="0"/>
               </a:rPr>
-              <a:t>NLP Chatbot</a:t>
+              <a:t>Bulk Manual Entry.</a:t>
             </a:r>
             <a:r>
               <a:rPr kumimoji="0" lang="en-US" altLang="en-US" sz="1400" b="0" i="0" u="none" strike="noStrike" cap="none" normalizeH="0" baseline="0" dirty="0">
@@ -7815,7 +7873,7 @@
                 <a:latin typeface="Times New Roman" panose="02020603050405020304" pitchFamily="18" charset="0"/>
                 <a:cs typeface="Times New Roman" panose="02020603050405020304" pitchFamily="18" charset="0"/>
               </a:rPr>
-              <a:t> (Text-based).</a:t>
+              <a:t>.</a:t>
             </a:r>
           </a:p>
           <a:p>
@@ -7914,7 +7972,7 @@
               <a:tabLst/>
             </a:pPr>
             <a:r>
-              <a:rPr kumimoji="0" lang="en-US" altLang="en-US" sz="1400" b="1" i="0" u="none" strike="noStrike" cap="none" normalizeH="0" baseline="0" dirty="0">
+              <a:rPr kumimoji="0" lang="en-GB" altLang="en-US" sz="1400" b="1" i="0" u="none" strike="noStrike" cap="none" normalizeH="0" baseline="0" dirty="0">
                 <a:ln>
                   <a:noFill/>
                 </a:ln>
@@ -7927,7 +7985,7 @@
                 <a:latin typeface="Times New Roman" panose="02020603050405020304" pitchFamily="18" charset="0"/>
                 <a:cs typeface="Times New Roman" panose="02020603050405020304" pitchFamily="18" charset="0"/>
               </a:rPr>
-              <a:t>Step 2: NLP Command Processing</a:t>
+              <a:t>Automated Validation: </a:t>
             </a:r>
           </a:p>
           <a:p>
@@ -7947,7 +8005,7 @@
               <a:buChar char="•"/>
               <a:tabLst/>
             </a:pPr>
-            <a:endParaRPr kumimoji="0" lang="en-US" altLang="en-US" sz="1400" b="0" i="0" u="none" strike="noStrike" cap="none" normalizeH="0" baseline="0" dirty="0">
+            <a:endParaRPr kumimoji="0" lang="en-GB" altLang="en-US" sz="1400" b="1" i="0" u="none" strike="noStrike" cap="none" normalizeH="0" baseline="0" dirty="0">
               <a:ln>
                 <a:noFill/>
               </a:ln>
@@ -7962,7 +8020,7 @@
             </a:endParaRPr>
           </a:p>
           <a:p>
-            <a:pPr marL="628650" lvl="1" indent="-171450" eaLnBrk="0" fontAlgn="base" hangingPunct="0">
+            <a:pPr marL="742950" lvl="1" indent="-285750" eaLnBrk="0" fontAlgn="base" hangingPunct="0">
               <a:spcBef>
                 <a:spcPct val="0"/>
               </a:spcBef>
@@ -7973,7 +8031,7 @@
               <a:buChar char="o"/>
             </a:pPr>
             <a:r>
-              <a:rPr kumimoji="0" lang="en-US" altLang="en-US" sz="1400" b="0" i="0" u="none" strike="noStrike" cap="none" normalizeH="0" baseline="0" dirty="0">
+              <a:rPr kumimoji="0" lang="en-GB" altLang="en-US" sz="1400" i="0" u="none" strike="noStrike" cap="none" normalizeH="0" baseline="0" dirty="0">
                 <a:ln>
                   <a:noFill/>
                 </a:ln>
@@ -7986,39 +8044,7 @@
                 <a:latin typeface="Times New Roman" panose="02020603050405020304" pitchFamily="18" charset="0"/>
                 <a:cs typeface="Times New Roman" panose="02020603050405020304" pitchFamily="18" charset="0"/>
               </a:rPr>
-              <a:t>The system parses natural language (e.g., </a:t>
-            </a:r>
-            <a:r>
-              <a:rPr kumimoji="0" lang="en-US" altLang="en-US" sz="1400" b="0" i="1" u="none" strike="noStrike" cap="none" normalizeH="0" baseline="0" dirty="0">
-                <a:ln>
-                  <a:noFill/>
-                </a:ln>
-                <a:solidFill>
-                  <a:schemeClr val="accent2">
-                    <a:lumMod val="50000"/>
-                  </a:schemeClr>
-                </a:solidFill>
-                <a:effectLst/>
-                <a:latin typeface="Times New Roman" panose="02020603050405020304" pitchFamily="18" charset="0"/>
-                <a:cs typeface="Times New Roman" panose="02020603050405020304" pitchFamily="18" charset="0"/>
-              </a:rPr>
-              <a:t>"Roll 45 absent, others present"</a:t>
-            </a:r>
-            <a:r>
-              <a:rPr kumimoji="0" lang="en-US" altLang="en-US" sz="1400" b="0" i="0" u="none" strike="noStrike" cap="none" normalizeH="0" baseline="0" dirty="0">
-                <a:ln>
-                  <a:noFill/>
-                </a:ln>
-                <a:solidFill>
-                  <a:schemeClr val="accent2">
-                    <a:lumMod val="50000"/>
-                  </a:schemeClr>
-                </a:solidFill>
-                <a:effectLst/>
-                <a:latin typeface="Times New Roman" panose="02020603050405020304" pitchFamily="18" charset="0"/>
-                <a:cs typeface="Times New Roman" panose="02020603050405020304" pitchFamily="18" charset="0"/>
-              </a:rPr>
-              <a:t>) using a text-processing engine to update the database without manual ticking.</a:t>
+              <a:t>The system cross-verifies QR timestamps against the Master Timetable to prevent 'buddy punching’.</a:t>
             </a:r>
           </a:p>
           <a:p>
@@ -8029,10 +8055,10 @@
               <a:spcAft>
                 <a:spcPct val="0"/>
               </a:spcAft>
-              <a:buFont typeface="Courier New" panose="02070309020205020404" pitchFamily="49" charset="0"/>
-              <a:buChar char="o"/>
+              <a:buFont typeface="Arial" panose="020B0604020202020204" pitchFamily="34" charset="0"/>
+              <a:buChar char="•"/>
             </a:pPr>
-            <a:endParaRPr kumimoji="0" lang="en-US" altLang="en-US" sz="1400" b="0" i="0" u="none" strike="noStrike" cap="none" normalizeH="0" baseline="0" dirty="0">
+            <a:endParaRPr kumimoji="0" lang="en-GB" altLang="en-US" sz="1400" b="1" i="0" u="none" strike="noStrike" cap="none" normalizeH="0" baseline="0" dirty="0">
               <a:ln>
                 <a:noFill/>
               </a:ln>
@@ -8946,10 +8972,10 @@
       </p:sp>
       <p:pic>
         <p:nvPicPr>
-          <p:cNvPr id="5" name="Picture 4" descr="A diagram of a computer">
+          <p:cNvPr id="4" name="Picture 3">
             <a:extLst>
               <a:ext uri="{FF2B5EF4-FFF2-40B4-BE49-F238E27FC236}">
-                <a16:creationId xmlns:a16="http://schemas.microsoft.com/office/drawing/2014/main" id="{25831EC7-041F-B0EA-6281-BCD6EB1E16B1}"/>
+                <a16:creationId xmlns:a16="http://schemas.microsoft.com/office/drawing/2014/main" id="{DC95EA71-1B02-54E2-9A65-0ED34D7DABF7}"/>
               </a:ext>
             </a:extLst>
           </p:cNvPr>
@@ -8959,19 +8985,30 @@
           <p:nvPr/>
         </p:nvPicPr>
         <p:blipFill>
-          <a:blip r:embed="rId3"/>
+          <a:blip r:embed="rId3" cstate="print">
+            <a:extLst>
+              <a:ext uri="{28A0092B-C50C-407E-A947-70E740481C1C}">
+                <a14:useLocalDpi xmlns:a14="http://schemas.microsoft.com/office/drawing/2010/main" val="0"/>
+              </a:ext>
+            </a:extLst>
+          </a:blip>
+          <a:srcRect/>
           <a:stretch>
             <a:fillRect/>
           </a:stretch>
         </p:blipFill>
-        <p:spPr>
+        <p:spPr bwMode="auto">
           <a:xfrm>
-            <a:off x="269967" y="1149530"/>
-            <a:ext cx="8125096" cy="3561807"/>
+            <a:off x="2062661" y="1427117"/>
+            <a:ext cx="4635500" cy="2933700"/>
           </a:xfrm>
           <a:prstGeom prst="rect">
             <a:avLst/>
           </a:prstGeom>
+          <a:noFill/>
+          <a:ln>
+            <a:noFill/>
+          </a:ln>
         </p:spPr>
       </p:pic>
     </p:spTree>
@@ -9793,8 +9830,8 @@
         </p:nvSpPr>
         <p:spPr bwMode="auto">
           <a:xfrm rot="10800000" flipV="1">
-            <a:off x="66039" y="1328122"/>
-            <a:ext cx="9077961" cy="2800767"/>
+            <a:off x="66039" y="1451233"/>
+            <a:ext cx="9077961" cy="2554545"/>
           </a:xfrm>
           <a:prstGeom prst="rect">
             <a:avLst/>
@@ -9888,10 +9925,10 @@
                 <a:latin typeface="Times New Roman" panose="02020603050405020304" pitchFamily="18" charset="0"/>
                 <a:cs typeface="Times New Roman" panose="02020603050405020304" pitchFamily="18" charset="0"/>
               </a:rPr>
-              <a:t> Reducing attendance marking time from ~10 minutes (manual) to </a:t>
-            </a:r>
-            <a:r>
-              <a:rPr kumimoji="0" lang="en-US" altLang="en-US" sz="1600" b="1" i="0" u="none" strike="noStrike" cap="none" normalizeH="0" baseline="0" dirty="0">
+              <a:t> </a:t>
+            </a:r>
+            <a:r>
+              <a:rPr kumimoji="0" lang="en-GB" altLang="en-US" sz="1600" b="0" i="0" u="none" strike="noStrike" cap="none" normalizeH="0" baseline="0" dirty="0">
                 <a:ln>
                   <a:noFill/>
                 </a:ln>
@@ -9904,23 +9941,7 @@
                 <a:latin typeface="Times New Roman" panose="02020603050405020304" pitchFamily="18" charset="0"/>
                 <a:cs typeface="Times New Roman" panose="02020603050405020304" pitchFamily="18" charset="0"/>
               </a:rPr>
-              <a:t>&lt;30 seconds (QR/NLP)</a:t>
-            </a:r>
-            <a:r>
-              <a:rPr kumimoji="0" lang="en-US" altLang="en-US" sz="1600" b="0" i="0" u="none" strike="noStrike" cap="none" normalizeH="0" baseline="0" dirty="0">
-                <a:ln>
-                  <a:noFill/>
-                </a:ln>
-                <a:solidFill>
-                  <a:schemeClr val="accent2">
-                    <a:lumMod val="50000"/>
-                  </a:schemeClr>
-                </a:solidFill>
-                <a:effectLst/>
-                <a:latin typeface="Times New Roman" panose="02020603050405020304" pitchFamily="18" charset="0"/>
-                <a:cs typeface="Times New Roman" panose="02020603050405020304" pitchFamily="18" charset="0"/>
-              </a:rPr>
-              <a:t>.</a:t>
+              <a:t>Reducing attendance marking time... to &lt;30 seconds via optimized QR flows.</a:t>
             </a:r>
           </a:p>
           <a:p>
